--- a/videos/machine-learning/03_ridger_regression_gradient_descent/recreated_pptx/slide_009_recreated.pptx
+++ b/videos/machine-learning/03_ridger_regression_gradient_descent/recreated_pptx/slide_009_recreated.pptx
@@ -852,7 +852,7 @@
 </file>
 
 <file path=ppt/slides/slide1.xml><?xml version="1.0" encoding="utf-8"?>
-<p:sld xmlns:a="http://schemas.openxmlformats.org/drawingml/2006/main" xmlns:r="http://schemas.openxmlformats.org/officeDocument/2006/relationships" xmlns:p="http://schemas.openxmlformats.org/presentationml/2006/main">
+<p:sld xmlns:mc="http://schemas.openxmlformats.org/markup-compatibility/2006" xmlns:a="http://schemas.openxmlformats.org/drawingml/2006/main" xmlns:r="http://schemas.openxmlformats.org/officeDocument/2006/relationships" xmlns:p="http://schemas.openxmlformats.org/presentationml/2006/main">
   <p:cSld name="Slide 1">
     <p:bg>
       <p:bgPr>
@@ -1995,248 +1995,8 @@
         </p:nvSpPr>
         <p:spPr>
           <a:xfrm>
-            <a:off x="2460625" y="1793875"/>
-            <a:ext cx="95250" cy="95250"/>
-          </a:xfrm>
-          <a:prstGeom prst="ellipse">
-            <a:avLst/>
-          </a:prstGeom>
-          <a:solidFill>
-            <a:srgbClr val="FFA500"/>
-          </a:solidFill>
-          <a:ln/>
-        </p:spPr>
-      </p:sp>
-      <p:sp>
-        <p:nvSpPr>
-          <p:cNvPr id="55" name="Shape 53"/>
-          <p:cNvSpPr/>
-          <p:nvPr/>
-        </p:nvSpPr>
-        <p:spPr>
-          <a:xfrm>
-            <a:off x="2346325" y="4467225"/>
-            <a:ext cx="95250" cy="95250"/>
-          </a:xfrm>
-          <a:prstGeom prst="ellipse">
-            <a:avLst/>
-          </a:prstGeom>
-          <a:solidFill>
-            <a:srgbClr val="FFA500"/>
-          </a:solidFill>
-          <a:ln/>
-        </p:spPr>
-      </p:sp>
-      <p:sp>
-        <p:nvSpPr>
-          <p:cNvPr id="56" name="Shape 54"/>
-          <p:cNvSpPr/>
-          <p:nvPr/>
-        </p:nvSpPr>
-        <p:spPr>
-          <a:xfrm>
-            <a:off x="2193925" y="4784725"/>
-            <a:ext cx="95250" cy="95250"/>
-          </a:xfrm>
-          <a:prstGeom prst="ellipse">
-            <a:avLst/>
-          </a:prstGeom>
-          <a:solidFill>
-            <a:srgbClr val="FFA500"/>
-          </a:solidFill>
-          <a:ln/>
-        </p:spPr>
-      </p:sp>
-      <p:sp>
-        <p:nvSpPr>
-          <p:cNvPr id="57" name="Shape 55"/>
-          <p:cNvSpPr/>
-          <p:nvPr/>
-        </p:nvSpPr>
-        <p:spPr>
-          <a:xfrm>
-            <a:off x="3032125" y="4111625"/>
-            <a:ext cx="95250" cy="95250"/>
-          </a:xfrm>
-          <a:prstGeom prst="ellipse">
-            <a:avLst/>
-          </a:prstGeom>
-          <a:solidFill>
-            <a:srgbClr val="FFA500"/>
-          </a:solidFill>
-          <a:ln/>
-        </p:spPr>
-      </p:sp>
-      <p:sp>
-        <p:nvSpPr>
-          <p:cNvPr id="58" name="Shape 56"/>
-          <p:cNvSpPr/>
-          <p:nvPr/>
-        </p:nvSpPr>
-        <p:spPr>
-          <a:xfrm>
-            <a:off x="3260725" y="4187825"/>
-            <a:ext cx="95250" cy="95250"/>
-          </a:xfrm>
-          <a:prstGeom prst="ellipse">
-            <a:avLst/>
-          </a:prstGeom>
-          <a:solidFill>
-            <a:srgbClr val="FFA500"/>
-          </a:solidFill>
-          <a:ln/>
-        </p:spPr>
-      </p:sp>
-      <p:sp>
-        <p:nvSpPr>
-          <p:cNvPr id="59" name="Shape 57"/>
-          <p:cNvSpPr/>
-          <p:nvPr/>
-        </p:nvSpPr>
-        <p:spPr>
-          <a:xfrm>
-            <a:off x="3686175" y="4187825"/>
-            <a:ext cx="95250" cy="95250"/>
-          </a:xfrm>
-          <a:prstGeom prst="ellipse">
-            <a:avLst/>
-          </a:prstGeom>
-          <a:solidFill>
-            <a:srgbClr val="FFA500"/>
-          </a:solidFill>
-          <a:ln/>
-        </p:spPr>
-      </p:sp>
-      <p:sp>
-        <p:nvSpPr>
-          <p:cNvPr id="60" name="Shape 58"/>
-          <p:cNvSpPr/>
-          <p:nvPr/>
-        </p:nvSpPr>
-        <p:spPr>
-          <a:xfrm>
-            <a:off x="4067175" y="3635375"/>
-            <a:ext cx="95250" cy="95250"/>
-          </a:xfrm>
-          <a:prstGeom prst="ellipse">
-            <a:avLst/>
-          </a:prstGeom>
-          <a:solidFill>
-            <a:srgbClr val="FFA500"/>
-          </a:solidFill>
-          <a:ln/>
-        </p:spPr>
-      </p:sp>
-      <p:sp>
-        <p:nvSpPr>
-          <p:cNvPr id="61" name="Shape 59"/>
-          <p:cNvSpPr/>
-          <p:nvPr/>
-        </p:nvSpPr>
-        <p:spPr>
-          <a:xfrm>
-            <a:off x="4124325" y="4168775"/>
-            <a:ext cx="95250" cy="95250"/>
-          </a:xfrm>
-          <a:prstGeom prst="ellipse">
-            <a:avLst/>
-          </a:prstGeom>
-          <a:solidFill>
-            <a:srgbClr val="FFA500"/>
-          </a:solidFill>
-          <a:ln/>
-        </p:spPr>
-      </p:sp>
-      <p:sp>
-        <p:nvSpPr>
-          <p:cNvPr id="62" name="Shape 60"/>
-          <p:cNvSpPr/>
-          <p:nvPr/>
-        </p:nvSpPr>
-        <p:spPr>
-          <a:xfrm>
-            <a:off x="4797425" y="3781425"/>
-            <a:ext cx="95250" cy="95250"/>
-          </a:xfrm>
-          <a:prstGeom prst="ellipse">
-            <a:avLst/>
-          </a:prstGeom>
-          <a:solidFill>
-            <a:srgbClr val="FFA500"/>
-          </a:solidFill>
-          <a:ln/>
-        </p:spPr>
-      </p:sp>
-      <p:sp>
-        <p:nvSpPr>
-          <p:cNvPr id="63" name="Shape 61"/>
-          <p:cNvSpPr/>
-          <p:nvPr/>
-        </p:nvSpPr>
-        <p:spPr>
-          <a:xfrm>
-            <a:off x="5000625" y="3114675"/>
-            <a:ext cx="95250" cy="95250"/>
-          </a:xfrm>
-          <a:prstGeom prst="ellipse">
-            <a:avLst/>
-          </a:prstGeom>
-          <a:solidFill>
-            <a:srgbClr val="FFA500"/>
-          </a:solidFill>
-          <a:ln/>
-        </p:spPr>
-      </p:sp>
-      <p:sp>
-        <p:nvSpPr>
-          <p:cNvPr id="64" name="Shape 62"/>
-          <p:cNvSpPr/>
-          <p:nvPr/>
-        </p:nvSpPr>
-        <p:spPr>
-          <a:xfrm>
-            <a:off x="5305425" y="3190875"/>
-            <a:ext cx="95250" cy="95250"/>
-          </a:xfrm>
-          <a:prstGeom prst="ellipse">
-            <a:avLst/>
-          </a:prstGeom>
-          <a:solidFill>
-            <a:srgbClr val="FFA500"/>
-          </a:solidFill>
-          <a:ln/>
-        </p:spPr>
-      </p:sp>
-      <p:sp>
-        <p:nvSpPr>
-          <p:cNvPr id="65" name="Shape 63"/>
-          <p:cNvSpPr/>
-          <p:nvPr/>
-        </p:nvSpPr>
-        <p:spPr>
-          <a:xfrm>
-            <a:off x="2917825" y="4549775"/>
-            <a:ext cx="95250" cy="95250"/>
-          </a:xfrm>
-          <a:prstGeom prst="ellipse">
-            <a:avLst/>
-          </a:prstGeom>
-          <a:solidFill>
-            <a:srgbClr val="FFA500"/>
-          </a:solidFill>
-          <a:ln/>
-        </p:spPr>
-      </p:sp>
-      <p:sp>
-        <p:nvSpPr>
-          <p:cNvPr id="66" name="Shape 64"/>
-          <p:cNvSpPr/>
-          <p:nvPr/>
-        </p:nvSpPr>
-        <p:spPr>
-          <a:xfrm>
-            <a:off x="2501900" y="1854200"/>
-            <a:ext cx="660400" cy="1854200"/>
+            <a:off x="2508250" y="1841500"/>
+            <a:ext cx="913511" cy="1778381"/>
           </a:xfrm>
           <a:prstGeom prst="line">
             <a:avLst/>
@@ -2244,7 +2004,7 @@
           <a:noFill/>
           <a:ln w="12700">
             <a:solidFill>
-              <a:srgbClr val="ECBAC4"/>
+              <a:srgbClr val="C00000"/>
             </a:solidFill>
             <a:prstDash val="solid"/>
           </a:ln>
@@ -2252,34 +2012,14 @@
       </p:sp>
       <p:sp>
         <p:nvSpPr>
-          <p:cNvPr id="67" name="Shape 65"/>
-          <p:cNvSpPr/>
-          <p:nvPr/>
-        </p:nvSpPr>
-        <p:spPr>
-          <a:xfrm rot="9622158">
-            <a:off x="3101848" y="3615912"/>
-            <a:ext cx="88900" cy="95250"/>
-          </a:xfrm>
-          <a:prstGeom prst="triangle">
-            <a:avLst/>
-          </a:prstGeom>
-          <a:solidFill>
-            <a:srgbClr val="C00000"/>
-          </a:solidFill>
-          <a:ln/>
-        </p:spPr>
-      </p:sp>
-      <p:sp>
-        <p:nvSpPr>
-          <p:cNvPr id="68" name="Shape 66"/>
+          <p:cNvPr id="55" name="Shape 53"/>
           <p:cNvSpPr/>
           <p:nvPr/>
         </p:nvSpPr>
         <p:spPr>
           <a:xfrm flipV="1">
-            <a:off x="2082800" y="1993900"/>
-            <a:ext cx="266700" cy="127000"/>
+            <a:off x="2241550" y="1841500"/>
+            <a:ext cx="266700" cy="137033"/>
           </a:xfrm>
           <a:prstGeom prst="line">
             <a:avLst/>
@@ -2287,7 +2027,7 @@
           <a:noFill/>
           <a:ln w="12700">
             <a:solidFill>
-              <a:srgbClr val="ECBAC4"/>
+              <a:srgbClr val="C00000"/>
             </a:solidFill>
             <a:prstDash val="solid"/>
           </a:ln>
@@ -2295,14 +2035,14 @@
       </p:sp>
       <p:sp>
         <p:nvSpPr>
-          <p:cNvPr id="69" name="Shape 67"/>
-          <p:cNvSpPr/>
-          <p:nvPr/>
-        </p:nvSpPr>
-        <p:spPr>
-          <a:xfrm rot="2700000">
-            <a:off x="2348509" y="1890116"/>
-            <a:ext cx="82550" cy="101600"/>
+          <p:cNvPr id="56" name="Shape 54"/>
+          <p:cNvSpPr/>
+          <p:nvPr/>
+        </p:nvSpPr>
+        <p:spPr>
+          <a:xfrm rot="9168722">
+            <a:off x="3355551" y="3529893"/>
+            <a:ext cx="88900" cy="95250"/>
           </a:xfrm>
           <a:prstGeom prst="triangle">
             <a:avLst/>
@@ -2315,7 +2055,27 @@
       </p:sp>
       <p:sp>
         <p:nvSpPr>
-          <p:cNvPr id="70" name="Shape 68"/>
+          <p:cNvPr id="57" name="Shape 55"/>
+          <p:cNvSpPr/>
+          <p:nvPr/>
+        </p:nvSpPr>
+        <p:spPr>
+          <a:xfrm rot="-1631278">
+            <a:off x="2483562" y="1835185"/>
+            <a:ext cx="101600" cy="114300"/>
+          </a:xfrm>
+          <a:prstGeom prst="triangle">
+            <a:avLst/>
+          </a:prstGeom>
+          <a:solidFill>
+            <a:srgbClr val="C00000"/>
+          </a:solidFill>
+          <a:ln/>
+        </p:spPr>
+      </p:sp>
+      <p:sp>
+        <p:nvSpPr>
+          <p:cNvPr id="58" name="Shape 56"/>
           <p:cNvSpPr/>
           <p:nvPr/>
         </p:nvSpPr>
@@ -2335,12 +2095,252 @@
       </p:sp>
       <p:sp>
         <p:nvSpPr>
+          <p:cNvPr id="59" name="Shape 57"/>
+          <p:cNvSpPr/>
+          <p:nvPr/>
+        </p:nvSpPr>
+        <p:spPr>
+          <a:xfrm>
+            <a:off x="2460625" y="1793875"/>
+            <a:ext cx="95250" cy="95250"/>
+          </a:xfrm>
+          <a:prstGeom prst="ellipse">
+            <a:avLst/>
+          </a:prstGeom>
+          <a:solidFill>
+            <a:srgbClr val="FFA500"/>
+          </a:solidFill>
+          <a:ln/>
+        </p:spPr>
+      </p:sp>
+      <p:sp>
+        <p:nvSpPr>
+          <p:cNvPr id="60" name="Shape 58"/>
+          <p:cNvSpPr/>
+          <p:nvPr/>
+        </p:nvSpPr>
+        <p:spPr>
+          <a:xfrm>
+            <a:off x="2346325" y="4467225"/>
+            <a:ext cx="95250" cy="95250"/>
+          </a:xfrm>
+          <a:prstGeom prst="ellipse">
+            <a:avLst/>
+          </a:prstGeom>
+          <a:solidFill>
+            <a:srgbClr val="FFA500"/>
+          </a:solidFill>
+          <a:ln/>
+        </p:spPr>
+      </p:sp>
+      <p:sp>
+        <p:nvSpPr>
+          <p:cNvPr id="61" name="Shape 59"/>
+          <p:cNvSpPr/>
+          <p:nvPr/>
+        </p:nvSpPr>
+        <p:spPr>
+          <a:xfrm>
+            <a:off x="2193925" y="4784725"/>
+            <a:ext cx="95250" cy="95250"/>
+          </a:xfrm>
+          <a:prstGeom prst="ellipse">
+            <a:avLst/>
+          </a:prstGeom>
+          <a:solidFill>
+            <a:srgbClr val="FFA500"/>
+          </a:solidFill>
+          <a:ln/>
+        </p:spPr>
+      </p:sp>
+      <p:sp>
+        <p:nvSpPr>
+          <p:cNvPr id="62" name="Shape 60"/>
+          <p:cNvSpPr/>
+          <p:nvPr/>
+        </p:nvSpPr>
+        <p:spPr>
+          <a:xfrm>
+            <a:off x="3032125" y="4111625"/>
+            <a:ext cx="95250" cy="95250"/>
+          </a:xfrm>
+          <a:prstGeom prst="ellipse">
+            <a:avLst/>
+          </a:prstGeom>
+          <a:solidFill>
+            <a:srgbClr val="FFA500"/>
+          </a:solidFill>
+          <a:ln/>
+        </p:spPr>
+      </p:sp>
+      <p:sp>
+        <p:nvSpPr>
+          <p:cNvPr id="63" name="Shape 61"/>
+          <p:cNvSpPr/>
+          <p:nvPr/>
+        </p:nvSpPr>
+        <p:spPr>
+          <a:xfrm>
+            <a:off x="3260725" y="4187825"/>
+            <a:ext cx="95250" cy="95250"/>
+          </a:xfrm>
+          <a:prstGeom prst="ellipse">
+            <a:avLst/>
+          </a:prstGeom>
+          <a:solidFill>
+            <a:srgbClr val="FFA500"/>
+          </a:solidFill>
+          <a:ln/>
+        </p:spPr>
+      </p:sp>
+      <p:sp>
+        <p:nvSpPr>
+          <p:cNvPr id="64" name="Shape 62"/>
+          <p:cNvSpPr/>
+          <p:nvPr/>
+        </p:nvSpPr>
+        <p:spPr>
+          <a:xfrm>
+            <a:off x="3686175" y="4187825"/>
+            <a:ext cx="95250" cy="95250"/>
+          </a:xfrm>
+          <a:prstGeom prst="ellipse">
+            <a:avLst/>
+          </a:prstGeom>
+          <a:solidFill>
+            <a:srgbClr val="FFA500"/>
+          </a:solidFill>
+          <a:ln/>
+        </p:spPr>
+      </p:sp>
+      <p:sp>
+        <p:nvSpPr>
+          <p:cNvPr id="65" name="Shape 63"/>
+          <p:cNvSpPr/>
+          <p:nvPr/>
+        </p:nvSpPr>
+        <p:spPr>
+          <a:xfrm>
+            <a:off x="4067175" y="3635375"/>
+            <a:ext cx="95250" cy="95250"/>
+          </a:xfrm>
+          <a:prstGeom prst="ellipse">
+            <a:avLst/>
+          </a:prstGeom>
+          <a:solidFill>
+            <a:srgbClr val="FFA500"/>
+          </a:solidFill>
+          <a:ln/>
+        </p:spPr>
+      </p:sp>
+      <p:sp>
+        <p:nvSpPr>
+          <p:cNvPr id="66" name="Shape 64"/>
+          <p:cNvSpPr/>
+          <p:nvPr/>
+        </p:nvSpPr>
+        <p:spPr>
+          <a:xfrm>
+            <a:off x="4124325" y="4168775"/>
+            <a:ext cx="95250" cy="95250"/>
+          </a:xfrm>
+          <a:prstGeom prst="ellipse">
+            <a:avLst/>
+          </a:prstGeom>
+          <a:solidFill>
+            <a:srgbClr val="FFA500"/>
+          </a:solidFill>
+          <a:ln/>
+        </p:spPr>
+      </p:sp>
+      <p:sp>
+        <p:nvSpPr>
+          <p:cNvPr id="67" name="Shape 65"/>
+          <p:cNvSpPr/>
+          <p:nvPr/>
+        </p:nvSpPr>
+        <p:spPr>
+          <a:xfrm>
+            <a:off x="4797425" y="3781425"/>
+            <a:ext cx="95250" cy="95250"/>
+          </a:xfrm>
+          <a:prstGeom prst="ellipse">
+            <a:avLst/>
+          </a:prstGeom>
+          <a:solidFill>
+            <a:srgbClr val="FFA500"/>
+          </a:solidFill>
+          <a:ln/>
+        </p:spPr>
+      </p:sp>
+      <p:sp>
+        <p:nvSpPr>
+          <p:cNvPr id="68" name="Shape 66"/>
+          <p:cNvSpPr/>
+          <p:nvPr/>
+        </p:nvSpPr>
+        <p:spPr>
+          <a:xfrm>
+            <a:off x="5000625" y="3114675"/>
+            <a:ext cx="95250" cy="95250"/>
+          </a:xfrm>
+          <a:prstGeom prst="ellipse">
+            <a:avLst/>
+          </a:prstGeom>
+          <a:solidFill>
+            <a:srgbClr val="FFA500"/>
+          </a:solidFill>
+          <a:ln/>
+        </p:spPr>
+      </p:sp>
+      <p:sp>
+        <p:nvSpPr>
+          <p:cNvPr id="69" name="Shape 67"/>
+          <p:cNvSpPr/>
+          <p:nvPr/>
+        </p:nvSpPr>
+        <p:spPr>
+          <a:xfrm>
+            <a:off x="5305425" y="3190875"/>
+            <a:ext cx="95250" cy="95250"/>
+          </a:xfrm>
+          <a:prstGeom prst="ellipse">
+            <a:avLst/>
+          </a:prstGeom>
+          <a:solidFill>
+            <a:srgbClr val="FFA500"/>
+          </a:solidFill>
+          <a:ln/>
+        </p:spPr>
+      </p:sp>
+      <p:sp>
+        <p:nvSpPr>
+          <p:cNvPr id="70" name="Shape 68"/>
+          <p:cNvSpPr/>
+          <p:nvPr/>
+        </p:nvSpPr>
+        <p:spPr>
+          <a:xfrm>
+            <a:off x="2917825" y="4549775"/>
+            <a:ext cx="95250" cy="95250"/>
+          </a:xfrm>
+          <a:prstGeom prst="ellipse">
+            <a:avLst/>
+          </a:prstGeom>
+          <a:solidFill>
+            <a:srgbClr val="FFA500"/>
+          </a:solidFill>
+          <a:ln/>
+        </p:spPr>
+      </p:sp>
+      <p:sp>
+        <p:nvSpPr>
           <p:cNvPr id="71" name="Text 69"/>
           <p:cNvSpPr/>
           <p:nvPr/>
         </p:nvSpPr>
         <p:spPr>
-          <a:xfrm rot="-4140000">
+          <a:xfrm rot="3768000">
             <a:off x="2095500" y="2603500"/>
             <a:ext cx="1143000" cy="177800"/>
           </a:xfrm>
@@ -3350,248 +3350,8 @@
         </p:nvSpPr>
         <p:spPr>
           <a:xfrm>
-            <a:off x="7712075" y="1793875"/>
-            <a:ext cx="95250" cy="95250"/>
-          </a:xfrm>
-          <a:prstGeom prst="ellipse">
-            <a:avLst/>
-          </a:prstGeom>
-          <a:solidFill>
-            <a:srgbClr val="FFA500"/>
-          </a:solidFill>
-          <a:ln/>
-        </p:spPr>
-      </p:sp>
-      <p:sp>
-        <p:nvSpPr>
-          <p:cNvPr id="120" name="Shape 118"/>
-          <p:cNvSpPr/>
-          <p:nvPr/>
-        </p:nvSpPr>
-        <p:spPr>
-          <a:xfrm>
-            <a:off x="7591425" y="4467225"/>
-            <a:ext cx="95250" cy="95250"/>
-          </a:xfrm>
-          <a:prstGeom prst="ellipse">
-            <a:avLst/>
-          </a:prstGeom>
-          <a:solidFill>
-            <a:srgbClr val="FFA500"/>
-          </a:solidFill>
-          <a:ln/>
-        </p:spPr>
-      </p:sp>
-      <p:sp>
-        <p:nvSpPr>
-          <p:cNvPr id="121" name="Shape 119"/>
-          <p:cNvSpPr/>
-          <p:nvPr/>
-        </p:nvSpPr>
-        <p:spPr>
-          <a:xfrm>
-            <a:off x="7439025" y="4784725"/>
-            <a:ext cx="95250" cy="95250"/>
-          </a:xfrm>
-          <a:prstGeom prst="ellipse">
-            <a:avLst/>
-          </a:prstGeom>
-          <a:solidFill>
-            <a:srgbClr val="FFA500"/>
-          </a:solidFill>
-          <a:ln/>
-        </p:spPr>
-      </p:sp>
-      <p:sp>
-        <p:nvSpPr>
-          <p:cNvPr id="122" name="Shape 120"/>
-          <p:cNvSpPr/>
-          <p:nvPr/>
-        </p:nvSpPr>
-        <p:spPr>
-          <a:xfrm>
-            <a:off x="8283575" y="4105275"/>
-            <a:ext cx="95250" cy="95250"/>
-          </a:xfrm>
-          <a:prstGeom prst="ellipse">
-            <a:avLst/>
-          </a:prstGeom>
-          <a:solidFill>
-            <a:srgbClr val="FFA500"/>
-          </a:solidFill>
-          <a:ln/>
-        </p:spPr>
-      </p:sp>
-      <p:sp>
-        <p:nvSpPr>
-          <p:cNvPr id="123" name="Shape 121"/>
-          <p:cNvSpPr/>
-          <p:nvPr/>
-        </p:nvSpPr>
-        <p:spPr>
-          <a:xfrm>
-            <a:off x="8512175" y="4187825"/>
-            <a:ext cx="95250" cy="95250"/>
-          </a:xfrm>
-          <a:prstGeom prst="ellipse">
-            <a:avLst/>
-          </a:prstGeom>
-          <a:solidFill>
-            <a:srgbClr val="FFA500"/>
-          </a:solidFill>
-          <a:ln/>
-        </p:spPr>
-      </p:sp>
-      <p:sp>
-        <p:nvSpPr>
-          <p:cNvPr id="124" name="Shape 122"/>
-          <p:cNvSpPr/>
-          <p:nvPr/>
-        </p:nvSpPr>
-        <p:spPr>
-          <a:xfrm>
-            <a:off x="8937625" y="4187825"/>
-            <a:ext cx="95250" cy="95250"/>
-          </a:xfrm>
-          <a:prstGeom prst="ellipse">
-            <a:avLst/>
-          </a:prstGeom>
-          <a:solidFill>
-            <a:srgbClr val="FFA500"/>
-          </a:solidFill>
-          <a:ln/>
-        </p:spPr>
-      </p:sp>
-      <p:sp>
-        <p:nvSpPr>
-          <p:cNvPr id="125" name="Shape 123"/>
-          <p:cNvSpPr/>
-          <p:nvPr/>
-        </p:nvSpPr>
-        <p:spPr>
-          <a:xfrm>
-            <a:off x="9318625" y="3635375"/>
-            <a:ext cx="95250" cy="95250"/>
-          </a:xfrm>
-          <a:prstGeom prst="ellipse">
-            <a:avLst/>
-          </a:prstGeom>
-          <a:solidFill>
-            <a:srgbClr val="FFA500"/>
-          </a:solidFill>
-          <a:ln/>
-        </p:spPr>
-      </p:sp>
-      <p:sp>
-        <p:nvSpPr>
-          <p:cNvPr id="126" name="Shape 124"/>
-          <p:cNvSpPr/>
-          <p:nvPr/>
-        </p:nvSpPr>
-        <p:spPr>
-          <a:xfrm>
-            <a:off x="9369425" y="4168775"/>
-            <a:ext cx="95250" cy="95250"/>
-          </a:xfrm>
-          <a:prstGeom prst="ellipse">
-            <a:avLst/>
-          </a:prstGeom>
-          <a:solidFill>
-            <a:srgbClr val="FFA500"/>
-          </a:solidFill>
-          <a:ln/>
-        </p:spPr>
-      </p:sp>
-      <p:sp>
-        <p:nvSpPr>
-          <p:cNvPr id="127" name="Shape 125"/>
-          <p:cNvSpPr/>
-          <p:nvPr/>
-        </p:nvSpPr>
-        <p:spPr>
-          <a:xfrm>
-            <a:off x="10036175" y="3787775"/>
-            <a:ext cx="95250" cy="95250"/>
-          </a:xfrm>
-          <a:prstGeom prst="ellipse">
-            <a:avLst/>
-          </a:prstGeom>
-          <a:solidFill>
-            <a:srgbClr val="FFA500"/>
-          </a:solidFill>
-          <a:ln/>
-        </p:spPr>
-      </p:sp>
-      <p:sp>
-        <p:nvSpPr>
-          <p:cNvPr id="128" name="Shape 126"/>
-          <p:cNvSpPr/>
-          <p:nvPr/>
-        </p:nvSpPr>
-        <p:spPr>
-          <a:xfrm>
-            <a:off x="10239375" y="3114675"/>
-            <a:ext cx="95250" cy="95250"/>
-          </a:xfrm>
-          <a:prstGeom prst="ellipse">
-            <a:avLst/>
-          </a:prstGeom>
-          <a:solidFill>
-            <a:srgbClr val="FFA500"/>
-          </a:solidFill>
-          <a:ln/>
-        </p:spPr>
-      </p:sp>
-      <p:sp>
-        <p:nvSpPr>
-          <p:cNvPr id="129" name="Shape 127"/>
-          <p:cNvSpPr/>
-          <p:nvPr/>
-        </p:nvSpPr>
-        <p:spPr>
-          <a:xfrm>
-            <a:off x="10550525" y="3190875"/>
-            <a:ext cx="95250" cy="95250"/>
-          </a:xfrm>
-          <a:prstGeom prst="ellipse">
-            <a:avLst/>
-          </a:prstGeom>
-          <a:solidFill>
-            <a:srgbClr val="FFA500"/>
-          </a:solidFill>
-          <a:ln/>
-        </p:spPr>
-      </p:sp>
-      <p:sp>
-        <p:nvSpPr>
-          <p:cNvPr id="130" name="Shape 128"/>
-          <p:cNvSpPr/>
-          <p:nvPr/>
-        </p:nvSpPr>
-        <p:spPr>
-          <a:xfrm>
-            <a:off x="8169275" y="4549775"/>
-            <a:ext cx="95250" cy="95250"/>
-          </a:xfrm>
-          <a:prstGeom prst="ellipse">
-            <a:avLst/>
-          </a:prstGeom>
-          <a:solidFill>
-            <a:srgbClr val="FFA500"/>
-          </a:solidFill>
-          <a:ln/>
-        </p:spPr>
-      </p:sp>
-      <p:sp>
-        <p:nvSpPr>
-          <p:cNvPr id="131" name="Shape 129"/>
-          <p:cNvSpPr/>
-          <p:nvPr/>
-        </p:nvSpPr>
-        <p:spPr>
-          <a:xfrm>
-            <a:off x="7759700" y="1866900"/>
-            <a:ext cx="901700" cy="2247900"/>
+            <a:off x="7759700" y="1841500"/>
+            <a:ext cx="1061593" cy="2229231"/>
           </a:xfrm>
           <a:prstGeom prst="line">
             <a:avLst/>
@@ -3599,7 +3359,7 @@
           <a:noFill/>
           <a:ln w="12700">
             <a:solidFill>
-              <a:srgbClr val="ECBAC4"/>
+              <a:srgbClr val="C00000"/>
             </a:solidFill>
             <a:prstDash val="solid"/>
           </a:ln>
@@ -3607,34 +3367,14 @@
       </p:sp>
       <p:sp>
         <p:nvSpPr>
-          <p:cNvPr id="132" name="Shape 130"/>
-          <p:cNvSpPr/>
-          <p:nvPr/>
-        </p:nvSpPr>
-        <p:spPr>
-          <a:xfrm rot="9489361">
-            <a:off x="8598052" y="4016858"/>
-            <a:ext cx="88900" cy="101600"/>
-          </a:xfrm>
-          <a:prstGeom prst="triangle">
-            <a:avLst/>
-          </a:prstGeom>
-          <a:solidFill>
-            <a:srgbClr val="C00000"/>
-          </a:solidFill>
-          <a:ln/>
-        </p:spPr>
-      </p:sp>
-      <p:sp>
-        <p:nvSpPr>
-          <p:cNvPr id="133" name="Shape 131"/>
+          <p:cNvPr id="120" name="Shape 118"/>
           <p:cNvSpPr/>
           <p:nvPr/>
         </p:nvSpPr>
         <p:spPr>
           <a:xfrm flipV="1">
-            <a:off x="7429500" y="1930400"/>
-            <a:ext cx="203200" cy="76200"/>
+            <a:off x="7505700" y="1841500"/>
+            <a:ext cx="254000" cy="120904"/>
           </a:xfrm>
           <a:prstGeom prst="line">
             <a:avLst/>
@@ -3642,7 +3382,7 @@
           <a:noFill/>
           <a:ln w="12700">
             <a:solidFill>
-              <a:srgbClr val="ECBAC4"/>
+              <a:srgbClr val="C00000"/>
             </a:solidFill>
             <a:prstDash val="solid"/>
           </a:ln>
@@ -3650,20 +3390,280 @@
       </p:sp>
       <p:sp>
         <p:nvSpPr>
+          <p:cNvPr id="121" name="Shape 119"/>
+          <p:cNvSpPr/>
+          <p:nvPr/>
+        </p:nvSpPr>
+        <p:spPr>
+          <a:xfrm rot="9272210">
+            <a:off x="8755003" y="3974066"/>
+            <a:ext cx="88900" cy="101600"/>
+          </a:xfrm>
+          <a:prstGeom prst="triangle">
+            <a:avLst/>
+          </a:prstGeom>
+          <a:solidFill>
+            <a:srgbClr val="C00000"/>
+          </a:solidFill>
+          <a:ln/>
+        </p:spPr>
+      </p:sp>
+      <p:sp>
+        <p:nvSpPr>
+          <p:cNvPr id="122" name="Shape 120"/>
+          <p:cNvSpPr/>
+          <p:nvPr/>
+        </p:nvSpPr>
+        <p:spPr>
+          <a:xfrm rot="-1527790">
+            <a:off x="7733470" y="1835948"/>
+            <a:ext cx="101600" cy="114300"/>
+          </a:xfrm>
+          <a:prstGeom prst="triangle">
+            <a:avLst/>
+          </a:prstGeom>
+          <a:solidFill>
+            <a:srgbClr val="C00000"/>
+          </a:solidFill>
+          <a:ln/>
+        </p:spPr>
+      </p:sp>
+      <p:sp>
+        <p:nvSpPr>
+          <p:cNvPr id="123" name="Shape 121"/>
+          <p:cNvSpPr/>
+          <p:nvPr/>
+        </p:nvSpPr>
+        <p:spPr>
+          <a:xfrm>
+            <a:off x="7712075" y="1793875"/>
+            <a:ext cx="95250" cy="95250"/>
+          </a:xfrm>
+          <a:prstGeom prst="ellipse">
+            <a:avLst/>
+          </a:prstGeom>
+          <a:solidFill>
+            <a:srgbClr val="FFA500"/>
+          </a:solidFill>
+          <a:ln/>
+        </p:spPr>
+      </p:sp>
+      <p:sp>
+        <p:nvSpPr>
+          <p:cNvPr id="124" name="Shape 122"/>
+          <p:cNvSpPr/>
+          <p:nvPr/>
+        </p:nvSpPr>
+        <p:spPr>
+          <a:xfrm>
+            <a:off x="7591425" y="4467225"/>
+            <a:ext cx="95250" cy="95250"/>
+          </a:xfrm>
+          <a:prstGeom prst="ellipse">
+            <a:avLst/>
+          </a:prstGeom>
+          <a:solidFill>
+            <a:srgbClr val="FFA500"/>
+          </a:solidFill>
+          <a:ln/>
+        </p:spPr>
+      </p:sp>
+      <p:sp>
+        <p:nvSpPr>
+          <p:cNvPr id="125" name="Shape 123"/>
+          <p:cNvSpPr/>
+          <p:nvPr/>
+        </p:nvSpPr>
+        <p:spPr>
+          <a:xfrm>
+            <a:off x="7439025" y="4784725"/>
+            <a:ext cx="95250" cy="95250"/>
+          </a:xfrm>
+          <a:prstGeom prst="ellipse">
+            <a:avLst/>
+          </a:prstGeom>
+          <a:solidFill>
+            <a:srgbClr val="FFA500"/>
+          </a:solidFill>
+          <a:ln/>
+        </p:spPr>
+      </p:sp>
+      <p:sp>
+        <p:nvSpPr>
+          <p:cNvPr id="126" name="Shape 124"/>
+          <p:cNvSpPr/>
+          <p:nvPr/>
+        </p:nvSpPr>
+        <p:spPr>
+          <a:xfrm>
+            <a:off x="8283575" y="4105275"/>
+            <a:ext cx="95250" cy="95250"/>
+          </a:xfrm>
+          <a:prstGeom prst="ellipse">
+            <a:avLst/>
+          </a:prstGeom>
+          <a:solidFill>
+            <a:srgbClr val="FFA500"/>
+          </a:solidFill>
+          <a:ln/>
+        </p:spPr>
+      </p:sp>
+      <p:sp>
+        <p:nvSpPr>
+          <p:cNvPr id="127" name="Shape 125"/>
+          <p:cNvSpPr/>
+          <p:nvPr/>
+        </p:nvSpPr>
+        <p:spPr>
+          <a:xfrm>
+            <a:off x="8512175" y="4187825"/>
+            <a:ext cx="95250" cy="95250"/>
+          </a:xfrm>
+          <a:prstGeom prst="ellipse">
+            <a:avLst/>
+          </a:prstGeom>
+          <a:solidFill>
+            <a:srgbClr val="FFA500"/>
+          </a:solidFill>
+          <a:ln/>
+        </p:spPr>
+      </p:sp>
+      <p:sp>
+        <p:nvSpPr>
+          <p:cNvPr id="128" name="Shape 126"/>
+          <p:cNvSpPr/>
+          <p:nvPr/>
+        </p:nvSpPr>
+        <p:spPr>
+          <a:xfrm>
+            <a:off x="8937625" y="4187825"/>
+            <a:ext cx="95250" cy="95250"/>
+          </a:xfrm>
+          <a:prstGeom prst="ellipse">
+            <a:avLst/>
+          </a:prstGeom>
+          <a:solidFill>
+            <a:srgbClr val="FFA500"/>
+          </a:solidFill>
+          <a:ln/>
+        </p:spPr>
+      </p:sp>
+      <p:sp>
+        <p:nvSpPr>
+          <p:cNvPr id="129" name="Shape 127"/>
+          <p:cNvSpPr/>
+          <p:nvPr/>
+        </p:nvSpPr>
+        <p:spPr>
+          <a:xfrm>
+            <a:off x="9318625" y="3635375"/>
+            <a:ext cx="95250" cy="95250"/>
+          </a:xfrm>
+          <a:prstGeom prst="ellipse">
+            <a:avLst/>
+          </a:prstGeom>
+          <a:solidFill>
+            <a:srgbClr val="FFA500"/>
+          </a:solidFill>
+          <a:ln/>
+        </p:spPr>
+      </p:sp>
+      <p:sp>
+        <p:nvSpPr>
+          <p:cNvPr id="130" name="Shape 128"/>
+          <p:cNvSpPr/>
+          <p:nvPr/>
+        </p:nvSpPr>
+        <p:spPr>
+          <a:xfrm>
+            <a:off x="9369425" y="4168775"/>
+            <a:ext cx="95250" cy="95250"/>
+          </a:xfrm>
+          <a:prstGeom prst="ellipse">
+            <a:avLst/>
+          </a:prstGeom>
+          <a:solidFill>
+            <a:srgbClr val="FFA500"/>
+          </a:solidFill>
+          <a:ln/>
+        </p:spPr>
+      </p:sp>
+      <p:sp>
+        <p:nvSpPr>
+          <p:cNvPr id="131" name="Shape 129"/>
+          <p:cNvSpPr/>
+          <p:nvPr/>
+        </p:nvSpPr>
+        <p:spPr>
+          <a:xfrm>
+            <a:off x="10036175" y="3787775"/>
+            <a:ext cx="95250" cy="95250"/>
+          </a:xfrm>
+          <a:prstGeom prst="ellipse">
+            <a:avLst/>
+          </a:prstGeom>
+          <a:solidFill>
+            <a:srgbClr val="FFA500"/>
+          </a:solidFill>
+          <a:ln/>
+        </p:spPr>
+      </p:sp>
+      <p:sp>
+        <p:nvSpPr>
+          <p:cNvPr id="132" name="Shape 130"/>
+          <p:cNvSpPr/>
+          <p:nvPr/>
+        </p:nvSpPr>
+        <p:spPr>
+          <a:xfrm>
+            <a:off x="10239375" y="3114675"/>
+            <a:ext cx="95250" cy="95250"/>
+          </a:xfrm>
+          <a:prstGeom prst="ellipse">
+            <a:avLst/>
+          </a:prstGeom>
+          <a:solidFill>
+            <a:srgbClr val="FFA500"/>
+          </a:solidFill>
+          <a:ln/>
+        </p:spPr>
+      </p:sp>
+      <p:sp>
+        <p:nvSpPr>
+          <p:cNvPr id="133" name="Shape 131"/>
+          <p:cNvSpPr/>
+          <p:nvPr/>
+        </p:nvSpPr>
+        <p:spPr>
+          <a:xfrm>
+            <a:off x="10550525" y="3190875"/>
+            <a:ext cx="95250" cy="95250"/>
+          </a:xfrm>
+          <a:prstGeom prst="ellipse">
+            <a:avLst/>
+          </a:prstGeom>
+          <a:solidFill>
+            <a:srgbClr val="FFA500"/>
+          </a:solidFill>
+          <a:ln/>
+        </p:spPr>
+      </p:sp>
+      <p:sp>
+        <p:nvSpPr>
           <p:cNvPr id="134" name="Shape 132"/>
           <p:cNvSpPr/>
           <p:nvPr/>
         </p:nvSpPr>
         <p:spPr>
-          <a:xfrm rot="2700000">
-            <a:off x="7631709" y="1813916"/>
-            <a:ext cx="82550" cy="101600"/>
-          </a:xfrm>
-          <a:prstGeom prst="triangle">
-            <a:avLst/>
-          </a:prstGeom>
-          <a:solidFill>
-            <a:srgbClr val="C00000"/>
+          <a:xfrm>
+            <a:off x="8169275" y="4549775"/>
+            <a:ext cx="95250" cy="95250"/>
+          </a:xfrm>
+          <a:prstGeom prst="ellipse">
+            <a:avLst/>
+          </a:prstGeom>
+          <a:solidFill>
+            <a:srgbClr val="FFA500"/>
           </a:solidFill>
           <a:ln/>
         </p:spPr>
@@ -3675,7 +3675,7 @@
           <p:nvPr/>
         </p:nvSpPr>
         <p:spPr>
-          <a:xfrm rot="-4080000">
+          <a:xfrm rot="3870000">
             <a:off x="7518400" y="2921000"/>
             <a:ext cx="1143000" cy="177800"/>
           </a:xfrm>
@@ -3835,30 +3835,126 @@
           </a:ln>
         </p:spPr>
       </p:sp>
-      <p:pic>
-        <p:nvPicPr>
-          <p:cNvPr id="142" name="Image 0" descr="/workspaces/codespaces-blank/ai_llm_slides/videos/machine-learning/03_ridger_regression_gradient_descent/recreated_pptx/build/assets/eq_009_left_attempt4.png">    </p:cNvPr>
-          <p:cNvPicPr>
-            <a:picLocks noChangeAspect="1"/>
-          </p:cNvPicPr>
-          <p:nvPr/>
-        </p:nvPicPr>
-        <p:blipFill>
-          <a:blip r:embed="rId1"/>
-          <a:stretch>
-            <a:fillRect/>
-          </a:stretch>
-        </p:blipFill>
-        <p:spPr>
-          <a:xfrm>
-            <a:off x="2860040" y="1958340"/>
-            <a:ext cx="1092708" cy="169164"/>
-          </a:xfrm>
-          <a:prstGeom prst="rect">
-            <a:avLst/>
-          </a:prstGeom>
-        </p:spPr>
-      </p:pic>
+      <mc:AlternateContent>
+        <mc:Choice xmlns:a14="http://schemas.microsoft.com/office/drawing/2010/main" Requires="a14">
+          <p:sp>
+            <p:nvSpPr>
+              <p:cNvPr id="142" name="Equation OMML" descr="50.85^{2} = 2585"/>
+              <p:cNvSpPr txBox="1"/>
+              <p:nvPr/>
+            </p:nvSpPr>
+            <p:spPr>
+              <a:xfrm>
+                <a:off x="2860040" y="1958340"/>
+                <a:ext cx="1092708" cy="169164"/>
+              </a:xfrm>
+              <a:prstGeom prst="rect">
+                <a:avLst/>
+              </a:prstGeom>
+              <a:noFill/>
+            </p:spPr>
+            <p:txBody>
+              <a:bodyPr lIns="0" tIns="0" rIns="0" bIns="0" anchor="ctr">
+                <a:noAutofit/>
+              </a:bodyPr>
+              <a:lstStyle/>
+              <a:p>
+                <a:pPr algn="ctr">
+                  <a:buNone/>
+                </a:pPr>
+                <a14:m>
+                  <m:oMathPara xmlns:m="http://schemas.openxmlformats.org/officeDocument/2006/math" xmlns:a="http://schemas.openxmlformats.org/drawingml/2006/main">
+                    <m:oMathParaPr>
+                      <m:jc m:val="centerGroup"/>
+                    </m:oMathParaPr>
+                    <m:oMath xmlns:m="http://schemas.openxmlformats.org/officeDocument/2006/math">
+                      <m:r>
+                        <a:rPr lang="en-US" i="1" smtClean="0" sz="1210">
+                          <a:solidFill>
+                            <a:srgbClr val="000000"/>
+                          </a:solidFill>
+                          <a:latin typeface="Cambria Math" panose="02040503050406030204" pitchFamily="18" charset="0"/>
+                        </a:rPr>
+                        <m:t xml:space="preserve">50.8</m:t>
+                      </m:r>
+                      <m:sSup>
+                        <m:sSupPr>
+                          <m:ctrlPr>
+                            <a:rPr lang="en-US" i="1" smtClean="0" sz="1210">
+                              <a:solidFill>
+                                <a:srgbClr val="000000"/>
+                              </a:solidFill>
+                              <a:latin typeface="Cambria Math" panose="02040503050406030204" pitchFamily="18" charset="0"/>
+                            </a:rPr>
+                          </m:ctrlPr>
+                        </m:sSupPr>
+                        <m:e>
+                          <m:r>
+                            <a:rPr lang="en-US" i="1" smtClean="0" sz="1210">
+                              <a:solidFill>
+                                <a:srgbClr val="000000"/>
+                              </a:solidFill>
+                              <a:latin typeface="Cambria Math" panose="02040503050406030204" pitchFamily="18" charset="0"/>
+                            </a:rPr>
+                            <m:t xml:space="preserve">5</m:t>
+                          </m:r>
+                        </m:e>
+                        <m:sup>
+                          <m:r>
+                            <a:rPr lang="en-US" i="1" smtClean="0" sz="1210">
+                              <a:solidFill>
+                                <a:srgbClr val="000000"/>
+                              </a:solidFill>
+                              <a:latin typeface="Cambria Math" panose="02040503050406030204" pitchFamily="18" charset="0"/>
+                            </a:rPr>
+                            <m:t xml:space="preserve">2</m:t>
+                          </m:r>
+                        </m:sup>
+                      </m:sSup>
+                      <m:r>
+                        <a:rPr lang="en-US" i="1" smtClean="0" sz="1210">
+                          <a:solidFill>
+                            <a:srgbClr val="000000"/>
+                          </a:solidFill>
+                          <a:latin typeface="Cambria Math" panose="02040503050406030204" pitchFamily="18" charset="0"/>
+                        </a:rPr>
+                        <m:t xml:space="preserve">=2585</m:t>
+                      </m:r>
+                    </m:oMath>
+                  </m:oMathPara>
+                </a14:m>
+                <a:endParaRPr lang="en-US" dirty="0"/>
+              </a:p>
+            </p:txBody>
+          </p:sp>
+        </mc:Choice>
+        <mc:Fallback>
+          <p:pic>
+            <p:nvPicPr>
+              <p:cNvPr id="142" name="Image 0" descr="/home/ahmed/Projects/ai_llm_slides/videos/machine-learning/03_ridger_regression_gradient_descent/recreated_pptx/build/assets/eq_009_left_attempt4.png">    </p:cNvPr>
+              <p:cNvPicPr>
+                <a:picLocks noChangeAspect="1"/>
+              </p:cNvPicPr>
+              <p:nvPr/>
+            </p:nvPicPr>
+            <p:blipFill>
+              <a:blip r:embed="rId1"/>
+              <a:stretch>
+                <a:fillRect/>
+              </a:stretch>
+            </p:blipFill>
+            <p:spPr>
+              <a:xfrm>
+                <a:off x="2860040" y="1958340"/>
+                <a:ext cx="1092708" cy="169164"/>
+              </a:xfrm>
+              <a:prstGeom prst="rect">
+                <a:avLst/>
+              </a:prstGeom>
+            </p:spPr>
+          </p:pic>
+        </mc:Fallback>
+      </mc:AlternateContent>
       <p:sp>
         <p:nvSpPr>
           <p:cNvPr id="143" name="Shape 140"/>
@@ -3884,30 +3980,126 @@
           </a:ln>
         </p:spPr>
       </p:sp>
-      <p:pic>
-        <p:nvPicPr>
-          <p:cNvPr id="144" name="Image 1" descr="/workspaces/codespaces-blank/ai_llm_slides/videos/machine-learning/03_ridger_regression_gradient_descent/recreated_pptx/build/assets/eq_009_right_attempt4.png">    </p:cNvPr>
-          <p:cNvPicPr>
-            <a:picLocks noChangeAspect="1"/>
-          </p:cNvPicPr>
-          <p:nvPr/>
-        </p:nvPicPr>
-        <p:blipFill>
-          <a:blip r:embed="rId2"/>
-          <a:stretch>
-            <a:fillRect/>
-          </a:stretch>
-        </p:blipFill>
-        <p:spPr>
-          <a:xfrm>
-            <a:off x="8155940" y="1958340"/>
-            <a:ext cx="1095756" cy="169164"/>
-          </a:xfrm>
-          <a:prstGeom prst="rect">
-            <a:avLst/>
-          </a:prstGeom>
-        </p:spPr>
-      </p:pic>
+      <mc:AlternateContent>
+        <mc:Choice xmlns:a14="http://schemas.microsoft.com/office/drawing/2010/main" Requires="a14">
+          <p:sp>
+            <p:nvSpPr>
+              <p:cNvPr id="144" name="Equation OMML" descr="63.64^{2} = 4050"/>
+              <p:cNvSpPr txBox="1"/>
+              <p:nvPr/>
+            </p:nvSpPr>
+            <p:spPr>
+              <a:xfrm>
+                <a:off x="8155940" y="1958340"/>
+                <a:ext cx="1095756" cy="169164"/>
+              </a:xfrm>
+              <a:prstGeom prst="rect">
+                <a:avLst/>
+              </a:prstGeom>
+              <a:noFill/>
+            </p:spPr>
+            <p:txBody>
+              <a:bodyPr lIns="0" tIns="0" rIns="0" bIns="0" anchor="ctr">
+                <a:noAutofit/>
+              </a:bodyPr>
+              <a:lstStyle/>
+              <a:p>
+                <a:pPr algn="ctr">
+                  <a:buNone/>
+                </a:pPr>
+                <a14:m>
+                  <m:oMathPara xmlns:m="http://schemas.openxmlformats.org/officeDocument/2006/math" xmlns:a="http://schemas.openxmlformats.org/drawingml/2006/main">
+                    <m:oMathParaPr>
+                      <m:jc m:val="centerGroup"/>
+                    </m:oMathParaPr>
+                    <m:oMath xmlns:m="http://schemas.openxmlformats.org/officeDocument/2006/math">
+                      <m:r>
+                        <a:rPr lang="en-US" i="1" smtClean="0" sz="1210">
+                          <a:solidFill>
+                            <a:srgbClr val="000000"/>
+                          </a:solidFill>
+                          <a:latin typeface="Cambria Math" panose="02040503050406030204" pitchFamily="18" charset="0"/>
+                        </a:rPr>
+                        <m:t xml:space="preserve">63.6</m:t>
+                      </m:r>
+                      <m:sSup>
+                        <m:sSupPr>
+                          <m:ctrlPr>
+                            <a:rPr lang="en-US" i="1" smtClean="0" sz="1210">
+                              <a:solidFill>
+                                <a:srgbClr val="000000"/>
+                              </a:solidFill>
+                              <a:latin typeface="Cambria Math" panose="02040503050406030204" pitchFamily="18" charset="0"/>
+                            </a:rPr>
+                          </m:ctrlPr>
+                        </m:sSupPr>
+                        <m:e>
+                          <m:r>
+                            <a:rPr lang="en-US" i="1" smtClean="0" sz="1210">
+                              <a:solidFill>
+                                <a:srgbClr val="000000"/>
+                              </a:solidFill>
+                              <a:latin typeface="Cambria Math" panose="02040503050406030204" pitchFamily="18" charset="0"/>
+                            </a:rPr>
+                            <m:t xml:space="preserve">4</m:t>
+                          </m:r>
+                        </m:e>
+                        <m:sup>
+                          <m:r>
+                            <a:rPr lang="en-US" i="1" smtClean="0" sz="1210">
+                              <a:solidFill>
+                                <a:srgbClr val="000000"/>
+                              </a:solidFill>
+                              <a:latin typeface="Cambria Math" panose="02040503050406030204" pitchFamily="18" charset="0"/>
+                            </a:rPr>
+                            <m:t xml:space="preserve">2</m:t>
+                          </m:r>
+                        </m:sup>
+                      </m:sSup>
+                      <m:r>
+                        <a:rPr lang="en-US" i="1" smtClean="0" sz="1210">
+                          <a:solidFill>
+                            <a:srgbClr val="000000"/>
+                          </a:solidFill>
+                          <a:latin typeface="Cambria Math" panose="02040503050406030204" pitchFamily="18" charset="0"/>
+                        </a:rPr>
+                        <m:t xml:space="preserve">=4050</m:t>
+                      </m:r>
+                    </m:oMath>
+                  </m:oMathPara>
+                </a14:m>
+                <a:endParaRPr lang="en-US" dirty="0"/>
+              </a:p>
+            </p:txBody>
+          </p:sp>
+        </mc:Choice>
+        <mc:Fallback>
+          <p:pic>
+            <p:nvPicPr>
+              <p:cNvPr id="144" name="Image 1" descr="/home/ahmed/Projects/ai_llm_slides/videos/machine-learning/03_ridger_regression_gradient_descent/recreated_pptx/build/assets/eq_009_right_attempt4.png">    </p:cNvPr>
+              <p:cNvPicPr>
+                <a:picLocks noChangeAspect="1"/>
+              </p:cNvPicPr>
+              <p:nvPr/>
+            </p:nvPicPr>
+            <p:blipFill>
+              <a:blip r:embed="rId2"/>
+              <a:stretch>
+                <a:fillRect/>
+              </a:stretch>
+            </p:blipFill>
+            <p:spPr>
+              <a:xfrm>
+                <a:off x="8155940" y="1958340"/>
+                <a:ext cx="1095756" cy="169164"/>
+              </a:xfrm>
+              <a:prstGeom prst="rect">
+                <a:avLst/>
+              </a:prstGeom>
+            </p:spPr>
+          </p:pic>
+        </mc:Fallback>
+      </mc:AlternateContent>
       <p:sp>
         <p:nvSpPr>
           <p:cNvPr id="145" name="Shape 141"/>
